--- a/PawsClassifier.pptx
+++ b/PawsClassifier.pptx
@@ -63,20 +63,23 @@
             <a:noAutofit/>
           </a:bodyPr>
           <a:p>
-            <a:r>
-              <a:rPr b="0" lang="en-US" sz="1800" spc="-1" strike="noStrike">
-                <a:solidFill>
-                  <a:srgbClr val="000000"/>
-                </a:solidFill>
-                <a:latin typeface="Calibri"/>
-              </a:rPr>
-              <a:t>Click to move the slide</a:t>
-            </a:r>
-            <a:endParaRPr b="0" lang="en-US" sz="1800" spc="-1" strike="noStrike">
-              <a:solidFill>
-                <a:srgbClr val="000000"/>
-              </a:solidFill>
-              <a:latin typeface="Calibri"/>
+            <a:pPr algn="ctr">
+              <a:buNone/>
+            </a:pPr>
+            <a:r>
+              <a:rPr b="0" lang="en-US" sz="4400" spc="-1" strike="noStrike">
+                <a:latin typeface="Arial"/>
+              </a:rPr>
+              <a:t>Click to move the </a:t>
+            </a:r>
+            <a:r>
+              <a:rPr b="0" lang="en-US" sz="4400" spc="-1" strike="noStrike">
+                <a:latin typeface="Arial"/>
+              </a:rPr>
+              <a:t>slide</a:t>
+            </a:r>
+            <a:endParaRPr b="0" lang="en-US" sz="4400" spc="-1" strike="noStrike">
+              <a:latin typeface="Arial"/>
             </a:endParaRPr>
           </a:p>
         </p:txBody>
@@ -113,97 +116,7 @@
               <a:rPr b="0" lang="en-US" sz="2000" spc="-1" strike="noStrike">
                 <a:latin typeface="Arial"/>
               </a:rPr>
-              <a:t>Clic</a:t>
-            </a:r>
-            <a:r>
-              <a:rPr b="0" lang="en-US" sz="2000" spc="-1" strike="noStrike">
-                <a:latin typeface="Arial"/>
-              </a:rPr>
-              <a:t>k </a:t>
-            </a:r>
-            <a:r>
-              <a:rPr b="0" lang="en-US" sz="2000" spc="-1" strike="noStrike">
-                <a:latin typeface="Arial"/>
-              </a:rPr>
-              <a:t>to </a:t>
-            </a:r>
-            <a:r>
-              <a:rPr b="0" lang="en-US" sz="2000" spc="-1" strike="noStrike">
-                <a:latin typeface="Arial"/>
-              </a:rPr>
-              <a:t>e</a:t>
-            </a:r>
-            <a:r>
-              <a:rPr b="0" lang="en-US" sz="2000" spc="-1" strike="noStrike">
-                <a:latin typeface="Arial"/>
-              </a:rPr>
-              <a:t>di</a:t>
-            </a:r>
-            <a:r>
-              <a:rPr b="0" lang="en-US" sz="2000" spc="-1" strike="noStrike">
-                <a:latin typeface="Arial"/>
-              </a:rPr>
-              <a:t>t </a:t>
-            </a:r>
-            <a:r>
-              <a:rPr b="0" lang="en-US" sz="2000" spc="-1" strike="noStrike">
-                <a:latin typeface="Arial"/>
-              </a:rPr>
-              <a:t>th</a:t>
-            </a:r>
-            <a:r>
-              <a:rPr b="0" lang="en-US" sz="2000" spc="-1" strike="noStrike">
-                <a:latin typeface="Arial"/>
-              </a:rPr>
-              <a:t>e </a:t>
-            </a:r>
-            <a:r>
-              <a:rPr b="0" lang="en-US" sz="2000" spc="-1" strike="noStrike">
-                <a:latin typeface="Arial"/>
-              </a:rPr>
-              <a:t>n</a:t>
-            </a:r>
-            <a:r>
-              <a:rPr b="0" lang="en-US" sz="2000" spc="-1" strike="noStrike">
-                <a:latin typeface="Arial"/>
-              </a:rPr>
-              <a:t>ot</a:t>
-            </a:r>
-            <a:r>
-              <a:rPr b="0" lang="en-US" sz="2000" spc="-1" strike="noStrike">
-                <a:latin typeface="Arial"/>
-              </a:rPr>
-              <a:t>e</a:t>
-            </a:r>
-            <a:r>
-              <a:rPr b="0" lang="en-US" sz="2000" spc="-1" strike="noStrike">
-                <a:latin typeface="Arial"/>
-              </a:rPr>
-              <a:t>s </a:t>
-            </a:r>
-            <a:r>
-              <a:rPr b="0" lang="en-US" sz="2000" spc="-1" strike="noStrike">
-                <a:latin typeface="Arial"/>
-              </a:rPr>
-              <a:t>fo</a:t>
-            </a:r>
-            <a:r>
-              <a:rPr b="0" lang="en-US" sz="2000" spc="-1" strike="noStrike">
-                <a:latin typeface="Arial"/>
-              </a:rPr>
-              <a:t>r</a:t>
-            </a:r>
-            <a:r>
-              <a:rPr b="0" lang="en-US" sz="2000" spc="-1" strike="noStrike">
-                <a:latin typeface="Arial"/>
-              </a:rPr>
-              <a:t>m</a:t>
-            </a:r>
-            <a:r>
-              <a:rPr b="0" lang="en-US" sz="2000" spc="-1" strike="noStrike">
-                <a:latin typeface="Arial"/>
-              </a:rPr>
-              <a:t>at</a:t>
+              <a:t>Click to edit the notes format</a:t>
             </a:r>
             <a:endParaRPr b="0" lang="en-US" sz="2000" spc="-1" strike="noStrike">
               <a:latin typeface="Arial"/>
@@ -388,7 +301,7 @@
             <a:pPr algn="r">
               <a:buNone/>
             </a:pPr>
-            <a:fld id="{09A4F46B-BB3B-47B3-A7B0-8F542ED1B8DA}" type="slidenum">
+            <a:fld id="{9E003DF5-6EEA-4B06-B465-1E5281A92C7E}" type="slidenum">
               <a:rPr b="0" lang="en-US" sz="1400" spc="-1" strike="noStrike">
                 <a:latin typeface="Times New Roman"/>
               </a:rPr>
@@ -436,7 +349,7 @@
         <p:spPr>
           <a:xfrm>
             <a:off x="685800" y="1143000"/>
-            <a:ext cx="5486040" cy="3085920"/>
+            <a:ext cx="5485680" cy="3085560"/>
           </a:xfrm>
           <a:prstGeom prst="rect">
             <a:avLst/>
@@ -459,18 +372,18 @@
         <p:spPr>
           <a:xfrm>
             <a:off x="685800" y="4400640"/>
-            <a:ext cx="5486040" cy="3600000"/>
-          </a:xfrm>
-          <a:prstGeom prst="rect">
-            <a:avLst/>
-          </a:prstGeom>
-          <a:noFill/>
-          <a:ln w="0">
-            <a:noFill/>
-          </a:ln>
-        </p:spPr>
-        <p:txBody>
-          <a:bodyPr anchor="t">
+            <a:ext cx="5485680" cy="3599640"/>
+          </a:xfrm>
+          <a:prstGeom prst="rect">
+            <a:avLst/>
+          </a:prstGeom>
+          <a:noFill/>
+          <a:ln w="0">
+            <a:noFill/>
+          </a:ln>
+        </p:spPr>
+        <p:txBody>
+          <a:bodyPr lIns="0" rIns="0" tIns="0" bIns="0" anchor="t">
             <a:noAutofit/>
           </a:bodyPr>
           <a:p>
@@ -493,18 +406,18 @@
         <p:spPr>
           <a:xfrm>
             <a:off x="3884760" y="8685360"/>
-            <a:ext cx="2971440" cy="458280"/>
-          </a:xfrm>
-          <a:prstGeom prst="rect">
-            <a:avLst/>
-          </a:prstGeom>
-          <a:noFill/>
-          <a:ln w="0">
-            <a:noFill/>
-          </a:ln>
-        </p:spPr>
-        <p:txBody>
-          <a:bodyPr anchor="b">
+            <a:ext cx="2971080" cy="457920"/>
+          </a:xfrm>
+          <a:prstGeom prst="rect">
+            <a:avLst/>
+          </a:prstGeom>
+          <a:noFill/>
+          <a:ln w="0">
+            <a:noFill/>
+          </a:ln>
+        </p:spPr>
+        <p:txBody>
+          <a:bodyPr lIns="0" rIns="0" tIns="0" bIns="0" anchor="b">
             <a:noAutofit/>
           </a:bodyPr>
           <a:lstStyle>
@@ -529,7 +442,7 @@
               </a:lnSpc>
               <a:buNone/>
             </a:pPr>
-            <a:fld id="{795CAD57-B780-471C-A7D1-17C3BA74848D}" type="slidenum">
+            <a:fld id="{0ABD42E2-308A-49B0-A40F-6760A57B5010}" type="slidenum">
               <a:rPr b="0" lang="en-US" sz="1200" spc="-1" strike="noStrike">
                 <a:solidFill>
                   <a:srgbClr val="000000"/>
@@ -580,7 +493,7 @@
         <p:spPr>
           <a:xfrm>
             <a:off x="685800" y="1143000"/>
-            <a:ext cx="5486040" cy="3085920"/>
+            <a:ext cx="5485680" cy="3085560"/>
           </a:xfrm>
           <a:prstGeom prst="rect">
             <a:avLst/>
@@ -603,18 +516,18 @@
         <p:spPr>
           <a:xfrm>
             <a:off x="685800" y="4400640"/>
-            <a:ext cx="5486040" cy="3600000"/>
-          </a:xfrm>
-          <a:prstGeom prst="rect">
-            <a:avLst/>
-          </a:prstGeom>
-          <a:noFill/>
-          <a:ln w="0">
-            <a:noFill/>
-          </a:ln>
-        </p:spPr>
-        <p:txBody>
-          <a:bodyPr anchor="t">
+            <a:ext cx="5485680" cy="3599640"/>
+          </a:xfrm>
+          <a:prstGeom prst="rect">
+            <a:avLst/>
+          </a:prstGeom>
+          <a:noFill/>
+          <a:ln w="0">
+            <a:noFill/>
+          </a:ln>
+        </p:spPr>
+        <p:txBody>
+          <a:bodyPr lIns="0" rIns="0" tIns="0" bIns="0" anchor="t">
             <a:noAutofit/>
           </a:bodyPr>
           <a:p>
@@ -637,18 +550,18 @@
         <p:spPr>
           <a:xfrm>
             <a:off x="3884760" y="8685360"/>
-            <a:ext cx="2971440" cy="458280"/>
-          </a:xfrm>
-          <a:prstGeom prst="rect">
-            <a:avLst/>
-          </a:prstGeom>
-          <a:noFill/>
-          <a:ln w="0">
-            <a:noFill/>
-          </a:ln>
-        </p:spPr>
-        <p:txBody>
-          <a:bodyPr anchor="b">
+            <a:ext cx="2971080" cy="457920"/>
+          </a:xfrm>
+          <a:prstGeom prst="rect">
+            <a:avLst/>
+          </a:prstGeom>
+          <a:noFill/>
+          <a:ln w="0">
+            <a:noFill/>
+          </a:ln>
+        </p:spPr>
+        <p:txBody>
+          <a:bodyPr lIns="0" rIns="0" tIns="0" bIns="0" anchor="b">
             <a:noAutofit/>
           </a:bodyPr>
           <a:lstStyle>
@@ -673,7 +586,7 @@
               </a:lnSpc>
               <a:buNone/>
             </a:pPr>
-            <a:fld id="{0D3FCB3E-8EA1-49A7-8EA3-A37C19D12E10}" type="slidenum">
+            <a:fld id="{286AA83D-5E67-4FF6-A1BB-529811D6E803}" type="slidenum">
               <a:rPr b="0" lang="en-US" sz="1200" spc="-1" strike="noStrike">
                 <a:solidFill>
                   <a:srgbClr val="000000"/>
@@ -724,7 +637,7 @@
         <p:spPr>
           <a:xfrm>
             <a:off x="685800" y="1143000"/>
-            <a:ext cx="5486040" cy="3085920"/>
+            <a:ext cx="5485680" cy="3085560"/>
           </a:xfrm>
           <a:prstGeom prst="rect">
             <a:avLst/>
@@ -747,18 +660,18 @@
         <p:spPr>
           <a:xfrm>
             <a:off x="685800" y="4400640"/>
-            <a:ext cx="5486040" cy="3600000"/>
-          </a:xfrm>
-          <a:prstGeom prst="rect">
-            <a:avLst/>
-          </a:prstGeom>
-          <a:noFill/>
-          <a:ln w="0">
-            <a:noFill/>
-          </a:ln>
-        </p:spPr>
-        <p:txBody>
-          <a:bodyPr anchor="t">
+            <a:ext cx="5485680" cy="3599640"/>
+          </a:xfrm>
+          <a:prstGeom prst="rect">
+            <a:avLst/>
+          </a:prstGeom>
+          <a:noFill/>
+          <a:ln w="0">
+            <a:noFill/>
+          </a:ln>
+        </p:spPr>
+        <p:txBody>
+          <a:bodyPr lIns="0" rIns="0" tIns="0" bIns="0" anchor="t">
             <a:noAutofit/>
           </a:bodyPr>
           <a:p>
@@ -781,18 +694,18 @@
         <p:spPr>
           <a:xfrm>
             <a:off x="3884760" y="8685360"/>
-            <a:ext cx="2971440" cy="458280"/>
-          </a:xfrm>
-          <a:prstGeom prst="rect">
-            <a:avLst/>
-          </a:prstGeom>
-          <a:noFill/>
-          <a:ln w="0">
-            <a:noFill/>
-          </a:ln>
-        </p:spPr>
-        <p:txBody>
-          <a:bodyPr anchor="b">
+            <a:ext cx="2971080" cy="457920"/>
+          </a:xfrm>
+          <a:prstGeom prst="rect">
+            <a:avLst/>
+          </a:prstGeom>
+          <a:noFill/>
+          <a:ln w="0">
+            <a:noFill/>
+          </a:ln>
+        </p:spPr>
+        <p:txBody>
+          <a:bodyPr lIns="0" rIns="0" tIns="0" bIns="0" anchor="b">
             <a:noAutofit/>
           </a:bodyPr>
           <a:lstStyle>
@@ -817,7 +730,7 @@
               </a:lnSpc>
               <a:buNone/>
             </a:pPr>
-            <a:fld id="{5477F819-074B-4EE5-971D-E48DC6C34432}" type="slidenum">
+            <a:fld id="{6EE9AA18-709C-45DB-913C-3C4E16A6CDEA}" type="slidenum">
               <a:rPr b="0" lang="en-US" sz="1200" spc="-1" strike="noStrike">
                 <a:solidFill>
                   <a:srgbClr val="000000"/>
@@ -868,7 +781,7 @@
         <p:spPr>
           <a:xfrm>
             <a:off x="685800" y="1143000"/>
-            <a:ext cx="5486040" cy="3085920"/>
+            <a:ext cx="5485680" cy="3085560"/>
           </a:xfrm>
           <a:prstGeom prst="rect">
             <a:avLst/>
@@ -891,18 +804,18 @@
         <p:spPr>
           <a:xfrm>
             <a:off x="685800" y="4400640"/>
-            <a:ext cx="5486040" cy="3600000"/>
-          </a:xfrm>
-          <a:prstGeom prst="rect">
-            <a:avLst/>
-          </a:prstGeom>
-          <a:noFill/>
-          <a:ln w="0">
-            <a:noFill/>
-          </a:ln>
-        </p:spPr>
-        <p:txBody>
-          <a:bodyPr anchor="t">
+            <a:ext cx="5485680" cy="3599640"/>
+          </a:xfrm>
+          <a:prstGeom prst="rect">
+            <a:avLst/>
+          </a:prstGeom>
+          <a:noFill/>
+          <a:ln w="0">
+            <a:noFill/>
+          </a:ln>
+        </p:spPr>
+        <p:txBody>
+          <a:bodyPr lIns="0" rIns="0" tIns="0" bIns="0" anchor="t">
             <a:noAutofit/>
           </a:bodyPr>
           <a:p>
@@ -925,18 +838,18 @@
         <p:spPr>
           <a:xfrm>
             <a:off x="3884760" y="8685360"/>
-            <a:ext cx="2971440" cy="458280"/>
-          </a:xfrm>
-          <a:prstGeom prst="rect">
-            <a:avLst/>
-          </a:prstGeom>
-          <a:noFill/>
-          <a:ln w="0">
-            <a:noFill/>
-          </a:ln>
-        </p:spPr>
-        <p:txBody>
-          <a:bodyPr anchor="b">
+            <a:ext cx="2971080" cy="457920"/>
+          </a:xfrm>
+          <a:prstGeom prst="rect">
+            <a:avLst/>
+          </a:prstGeom>
+          <a:noFill/>
+          <a:ln w="0">
+            <a:noFill/>
+          </a:ln>
+        </p:spPr>
+        <p:txBody>
+          <a:bodyPr lIns="0" rIns="0" tIns="0" bIns="0" anchor="b">
             <a:noAutofit/>
           </a:bodyPr>
           <a:lstStyle>
@@ -961,7 +874,7 @@
               </a:lnSpc>
               <a:buNone/>
             </a:pPr>
-            <a:fld id="{5C96CB69-8C97-46E6-8730-0F04A6DD7ADE}" type="slidenum">
+            <a:fld id="{FD8AD10D-9C5B-4C19-9C76-FA9DBBA509E1}" type="slidenum">
               <a:rPr b="0" lang="en-US" sz="1200" spc="-1" strike="noStrike">
                 <a:solidFill>
                   <a:srgbClr val="000000"/>
@@ -1049,11 +962,11 @@
             <a:noAutofit/>
           </a:bodyPr>
           <a:p>
-            <a:endParaRPr b="0" lang="en-US" sz="1800" spc="-1" strike="noStrike">
-              <a:solidFill>
-                <a:srgbClr val="000000"/>
-              </a:solidFill>
-              <a:latin typeface="Calibri"/>
+            <a:pPr algn="ctr">
+              <a:buNone/>
+            </a:pPr>
+            <a:endParaRPr b="0" lang="en-US" sz="4400" spc="-1" strike="noStrike">
+              <a:latin typeface="Arial"/>
             </a:endParaRPr>
           </a:p>
         </p:txBody>
@@ -1087,10 +1000,7 @@
           </a:bodyPr>
           <a:p>
             <a:endParaRPr b="0" lang="en-US" sz="3200" spc="-1" strike="noStrike">
-              <a:solidFill>
-                <a:srgbClr val="000000"/>
-              </a:solidFill>
-              <a:latin typeface="Calibri"/>
+              <a:latin typeface="Arial"/>
             </a:endParaRPr>
           </a:p>
         </p:txBody>
@@ -1124,10 +1034,7 @@
           </a:bodyPr>
           <a:p>
             <a:endParaRPr b="0" lang="en-US" sz="3200" spc="-1" strike="noStrike">
-              <a:solidFill>
-                <a:srgbClr val="000000"/>
-              </a:solidFill>
-              <a:latin typeface="Calibri"/>
+              <a:latin typeface="Arial"/>
             </a:endParaRPr>
           </a:p>
         </p:txBody>
@@ -1182,11 +1089,11 @@
             <a:noAutofit/>
           </a:bodyPr>
           <a:p>
-            <a:endParaRPr b="0" lang="en-US" sz="1800" spc="-1" strike="noStrike">
-              <a:solidFill>
-                <a:srgbClr val="000000"/>
-              </a:solidFill>
-              <a:latin typeface="Calibri"/>
+            <a:pPr algn="ctr">
+              <a:buNone/>
+            </a:pPr>
+            <a:endParaRPr b="0" lang="en-US" sz="4400" spc="-1" strike="noStrike">
+              <a:latin typeface="Arial"/>
             </a:endParaRPr>
           </a:p>
         </p:txBody>
@@ -1220,10 +1127,7 @@
           </a:bodyPr>
           <a:p>
             <a:endParaRPr b="0" lang="en-US" sz="3200" spc="-1" strike="noStrike">
-              <a:solidFill>
-                <a:srgbClr val="000000"/>
-              </a:solidFill>
-              <a:latin typeface="Calibri"/>
+              <a:latin typeface="Arial"/>
             </a:endParaRPr>
           </a:p>
         </p:txBody>
@@ -1257,10 +1161,7 @@
           </a:bodyPr>
           <a:p>
             <a:endParaRPr b="0" lang="en-US" sz="3200" spc="-1" strike="noStrike">
-              <a:solidFill>
-                <a:srgbClr val="000000"/>
-              </a:solidFill>
-              <a:latin typeface="Calibri"/>
+              <a:latin typeface="Arial"/>
             </a:endParaRPr>
           </a:p>
         </p:txBody>
@@ -1294,10 +1195,7 @@
           </a:bodyPr>
           <a:p>
             <a:endParaRPr b="0" lang="en-US" sz="3200" spc="-1" strike="noStrike">
-              <a:solidFill>
-                <a:srgbClr val="000000"/>
-              </a:solidFill>
-              <a:latin typeface="Calibri"/>
+              <a:latin typeface="Arial"/>
             </a:endParaRPr>
           </a:p>
         </p:txBody>
@@ -1331,10 +1229,7 @@
           </a:bodyPr>
           <a:p>
             <a:endParaRPr b="0" lang="en-US" sz="3200" spc="-1" strike="noStrike">
-              <a:solidFill>
-                <a:srgbClr val="000000"/>
-              </a:solidFill>
-              <a:latin typeface="Calibri"/>
+              <a:latin typeface="Arial"/>
             </a:endParaRPr>
           </a:p>
         </p:txBody>
@@ -1389,11 +1284,11 @@
             <a:noAutofit/>
           </a:bodyPr>
           <a:p>
-            <a:endParaRPr b="0" lang="en-US" sz="1800" spc="-1" strike="noStrike">
-              <a:solidFill>
-                <a:srgbClr val="000000"/>
-              </a:solidFill>
-              <a:latin typeface="Calibri"/>
+            <a:pPr algn="ctr">
+              <a:buNone/>
+            </a:pPr>
+            <a:endParaRPr b="0" lang="en-US" sz="4400" spc="-1" strike="noStrike">
+              <a:latin typeface="Arial"/>
             </a:endParaRPr>
           </a:p>
         </p:txBody>
@@ -1427,10 +1322,7 @@
           </a:bodyPr>
           <a:p>
             <a:endParaRPr b="0" lang="en-US" sz="3200" spc="-1" strike="noStrike">
-              <a:solidFill>
-                <a:srgbClr val="000000"/>
-              </a:solidFill>
-              <a:latin typeface="Calibri"/>
+              <a:latin typeface="Arial"/>
             </a:endParaRPr>
           </a:p>
         </p:txBody>
@@ -1464,10 +1356,7 @@
           </a:bodyPr>
           <a:p>
             <a:endParaRPr b="0" lang="en-US" sz="3200" spc="-1" strike="noStrike">
-              <a:solidFill>
-                <a:srgbClr val="000000"/>
-              </a:solidFill>
-              <a:latin typeface="Calibri"/>
+              <a:latin typeface="Arial"/>
             </a:endParaRPr>
           </a:p>
         </p:txBody>
@@ -1501,10 +1390,7 @@
           </a:bodyPr>
           <a:p>
             <a:endParaRPr b="0" lang="en-US" sz="3200" spc="-1" strike="noStrike">
-              <a:solidFill>
-                <a:srgbClr val="000000"/>
-              </a:solidFill>
-              <a:latin typeface="Calibri"/>
+              <a:latin typeface="Arial"/>
             </a:endParaRPr>
           </a:p>
         </p:txBody>
@@ -1538,10 +1424,7 @@
           </a:bodyPr>
           <a:p>
             <a:endParaRPr b="0" lang="en-US" sz="3200" spc="-1" strike="noStrike">
-              <a:solidFill>
-                <a:srgbClr val="000000"/>
-              </a:solidFill>
-              <a:latin typeface="Calibri"/>
+              <a:latin typeface="Arial"/>
             </a:endParaRPr>
           </a:p>
         </p:txBody>
@@ -1575,10 +1458,7 @@
           </a:bodyPr>
           <a:p>
             <a:endParaRPr b="0" lang="en-US" sz="3200" spc="-1" strike="noStrike">
-              <a:solidFill>
-                <a:srgbClr val="000000"/>
-              </a:solidFill>
-              <a:latin typeface="Calibri"/>
+              <a:latin typeface="Arial"/>
             </a:endParaRPr>
           </a:p>
         </p:txBody>
@@ -1612,10 +1492,7 @@
           </a:bodyPr>
           <a:p>
             <a:endParaRPr b="0" lang="en-US" sz="3200" spc="-1" strike="noStrike">
-              <a:solidFill>
-                <a:srgbClr val="000000"/>
-              </a:solidFill>
-              <a:latin typeface="Calibri"/>
+              <a:latin typeface="Arial"/>
             </a:endParaRPr>
           </a:p>
         </p:txBody>
@@ -1670,11 +1547,11 @@
             <a:noAutofit/>
           </a:bodyPr>
           <a:p>
-            <a:endParaRPr b="0" lang="en-US" sz="1800" spc="-1" strike="noStrike">
-              <a:solidFill>
-                <a:srgbClr val="000000"/>
-              </a:solidFill>
-              <a:latin typeface="Calibri"/>
+            <a:pPr algn="ctr">
+              <a:buNone/>
+            </a:pPr>
+            <a:endParaRPr b="0" lang="en-US" sz="4400" spc="-1" strike="noStrike">
+              <a:latin typeface="Arial"/>
             </a:endParaRPr>
           </a:p>
         </p:txBody>
@@ -1766,11 +1643,11 @@
             <a:noAutofit/>
           </a:bodyPr>
           <a:p>
-            <a:endParaRPr b="0" lang="en-US" sz="1800" spc="-1" strike="noStrike">
-              <a:solidFill>
-                <a:srgbClr val="000000"/>
-              </a:solidFill>
-              <a:latin typeface="Calibri"/>
+            <a:pPr algn="ctr">
+              <a:buNone/>
+            </a:pPr>
+            <a:endParaRPr b="0" lang="en-US" sz="4400" spc="-1" strike="noStrike">
+              <a:latin typeface="Arial"/>
             </a:endParaRPr>
           </a:p>
         </p:txBody>
@@ -1804,10 +1681,7 @@
           </a:bodyPr>
           <a:p>
             <a:endParaRPr b="0" lang="en-US" sz="3200" spc="-1" strike="noStrike">
-              <a:solidFill>
-                <a:srgbClr val="000000"/>
-              </a:solidFill>
-              <a:latin typeface="Calibri"/>
+              <a:latin typeface="Arial"/>
             </a:endParaRPr>
           </a:p>
         </p:txBody>
@@ -1862,11 +1736,11 @@
             <a:noAutofit/>
           </a:bodyPr>
           <a:p>
-            <a:endParaRPr b="0" lang="en-US" sz="1800" spc="-1" strike="noStrike">
-              <a:solidFill>
-                <a:srgbClr val="000000"/>
-              </a:solidFill>
-              <a:latin typeface="Calibri"/>
+            <a:pPr algn="ctr">
+              <a:buNone/>
+            </a:pPr>
+            <a:endParaRPr b="0" lang="en-US" sz="4400" spc="-1" strike="noStrike">
+              <a:latin typeface="Arial"/>
             </a:endParaRPr>
           </a:p>
         </p:txBody>
@@ -1900,10 +1774,7 @@
           </a:bodyPr>
           <a:p>
             <a:endParaRPr b="0" lang="en-US" sz="3200" spc="-1" strike="noStrike">
-              <a:solidFill>
-                <a:srgbClr val="000000"/>
-              </a:solidFill>
-              <a:latin typeface="Calibri"/>
+              <a:latin typeface="Arial"/>
             </a:endParaRPr>
           </a:p>
         </p:txBody>
@@ -1937,10 +1808,7 @@
           </a:bodyPr>
           <a:p>
             <a:endParaRPr b="0" lang="en-US" sz="3200" spc="-1" strike="noStrike">
-              <a:solidFill>
-                <a:srgbClr val="000000"/>
-              </a:solidFill>
-              <a:latin typeface="Calibri"/>
+              <a:latin typeface="Arial"/>
             </a:endParaRPr>
           </a:p>
         </p:txBody>
@@ -1995,11 +1863,11 @@
             <a:noAutofit/>
           </a:bodyPr>
           <a:p>
-            <a:endParaRPr b="0" lang="en-US" sz="1800" spc="-1" strike="noStrike">
-              <a:solidFill>
-                <a:srgbClr val="000000"/>
-              </a:solidFill>
-              <a:latin typeface="Calibri"/>
+            <a:pPr algn="ctr">
+              <a:buNone/>
+            </a:pPr>
+            <a:endParaRPr b="0" lang="en-US" sz="4400" spc="-1" strike="noStrike">
+              <a:latin typeface="Arial"/>
             </a:endParaRPr>
           </a:p>
         </p:txBody>
@@ -2113,11 +1981,11 @@
             <a:noAutofit/>
           </a:bodyPr>
           <a:p>
-            <a:endParaRPr b="0" lang="en-US" sz="1800" spc="-1" strike="noStrike">
-              <a:solidFill>
-                <a:srgbClr val="000000"/>
-              </a:solidFill>
-              <a:latin typeface="Calibri"/>
+            <a:pPr algn="ctr">
+              <a:buNone/>
+            </a:pPr>
+            <a:endParaRPr b="0" lang="en-US" sz="4400" spc="-1" strike="noStrike">
+              <a:latin typeface="Arial"/>
             </a:endParaRPr>
           </a:p>
         </p:txBody>
@@ -2151,10 +2019,7 @@
           </a:bodyPr>
           <a:p>
             <a:endParaRPr b="0" lang="en-US" sz="3200" spc="-1" strike="noStrike">
-              <a:solidFill>
-                <a:srgbClr val="000000"/>
-              </a:solidFill>
-              <a:latin typeface="Calibri"/>
+              <a:latin typeface="Arial"/>
             </a:endParaRPr>
           </a:p>
         </p:txBody>
@@ -2188,10 +2053,7 @@
           </a:bodyPr>
           <a:p>
             <a:endParaRPr b="0" lang="en-US" sz="3200" spc="-1" strike="noStrike">
-              <a:solidFill>
-                <a:srgbClr val="000000"/>
-              </a:solidFill>
-              <a:latin typeface="Calibri"/>
+              <a:latin typeface="Arial"/>
             </a:endParaRPr>
           </a:p>
         </p:txBody>
@@ -2225,10 +2087,7 @@
           </a:bodyPr>
           <a:p>
             <a:endParaRPr b="0" lang="en-US" sz="3200" spc="-1" strike="noStrike">
-              <a:solidFill>
-                <a:srgbClr val="000000"/>
-              </a:solidFill>
-              <a:latin typeface="Calibri"/>
+              <a:latin typeface="Arial"/>
             </a:endParaRPr>
           </a:p>
         </p:txBody>
@@ -2283,11 +2142,11 @@
             <a:noAutofit/>
           </a:bodyPr>
           <a:p>
-            <a:endParaRPr b="0" lang="en-US" sz="1800" spc="-1" strike="noStrike">
-              <a:solidFill>
-                <a:srgbClr val="000000"/>
-              </a:solidFill>
-              <a:latin typeface="Calibri"/>
+            <a:pPr algn="ctr">
+              <a:buNone/>
+            </a:pPr>
+            <a:endParaRPr b="0" lang="en-US" sz="4400" spc="-1" strike="noStrike">
+              <a:latin typeface="Arial"/>
             </a:endParaRPr>
           </a:p>
         </p:txBody>
@@ -2321,10 +2180,7 @@
           </a:bodyPr>
           <a:p>
             <a:endParaRPr b="0" lang="en-US" sz="3200" spc="-1" strike="noStrike">
-              <a:solidFill>
-                <a:srgbClr val="000000"/>
-              </a:solidFill>
-              <a:latin typeface="Calibri"/>
+              <a:latin typeface="Arial"/>
             </a:endParaRPr>
           </a:p>
         </p:txBody>
@@ -2358,10 +2214,7 @@
           </a:bodyPr>
           <a:p>
             <a:endParaRPr b="0" lang="en-US" sz="3200" spc="-1" strike="noStrike">
-              <a:solidFill>
-                <a:srgbClr val="000000"/>
-              </a:solidFill>
-              <a:latin typeface="Calibri"/>
+              <a:latin typeface="Arial"/>
             </a:endParaRPr>
           </a:p>
         </p:txBody>
@@ -2395,10 +2248,7 @@
           </a:bodyPr>
           <a:p>
             <a:endParaRPr b="0" lang="en-US" sz="3200" spc="-1" strike="noStrike">
-              <a:solidFill>
-                <a:srgbClr val="000000"/>
-              </a:solidFill>
-              <a:latin typeface="Calibri"/>
+              <a:latin typeface="Arial"/>
             </a:endParaRPr>
           </a:p>
         </p:txBody>
@@ -2453,11 +2303,11 @@
             <a:noAutofit/>
           </a:bodyPr>
           <a:p>
-            <a:endParaRPr b="0" lang="en-US" sz="1800" spc="-1" strike="noStrike">
-              <a:solidFill>
-                <a:srgbClr val="000000"/>
-              </a:solidFill>
-              <a:latin typeface="Calibri"/>
+            <a:pPr algn="ctr">
+              <a:buNone/>
+            </a:pPr>
+            <a:endParaRPr b="0" lang="en-US" sz="4400" spc="-1" strike="noStrike">
+              <a:latin typeface="Arial"/>
             </a:endParaRPr>
           </a:p>
         </p:txBody>
@@ -2491,10 +2341,7 @@
           </a:bodyPr>
           <a:p>
             <a:endParaRPr b="0" lang="en-US" sz="3200" spc="-1" strike="noStrike">
-              <a:solidFill>
-                <a:srgbClr val="000000"/>
-              </a:solidFill>
-              <a:latin typeface="Calibri"/>
+              <a:latin typeface="Arial"/>
             </a:endParaRPr>
           </a:p>
         </p:txBody>
@@ -2528,10 +2375,7 @@
           </a:bodyPr>
           <a:p>
             <a:endParaRPr b="0" lang="en-US" sz="3200" spc="-1" strike="noStrike">
-              <a:solidFill>
-                <a:srgbClr val="000000"/>
-              </a:solidFill>
-              <a:latin typeface="Calibri"/>
+              <a:latin typeface="Arial"/>
             </a:endParaRPr>
           </a:p>
         </p:txBody>
@@ -2565,10 +2409,7 @@
           </a:bodyPr>
           <a:p>
             <a:endParaRPr b="0" lang="en-US" sz="3200" spc="-1" strike="noStrike">
-              <a:solidFill>
-                <a:srgbClr val="000000"/>
-              </a:solidFill>
-              <a:latin typeface="Calibri"/>
+              <a:latin typeface="Arial"/>
             </a:endParaRPr>
           </a:p>
         </p:txBody>
@@ -2630,29 +2471,17 @@
             <a:noAutofit/>
           </a:bodyPr>
           <a:p>
-            <a:r>
-              <a:rPr b="0" lang="en-US" sz="1800" spc="-1" strike="noStrike">
-                <a:solidFill>
-                  <a:srgbClr val="000000"/>
-                </a:solidFill>
-                <a:latin typeface="Calibri"/>
-              </a:rPr>
-              <a:t>Click to edit the </a:t>
-            </a:r>
-            <a:r>
-              <a:rPr b="0" lang="en-US" sz="1800" spc="-1" strike="noStrike">
-                <a:solidFill>
-                  <a:srgbClr val="000000"/>
-                </a:solidFill>
-                <a:latin typeface="Calibri"/>
-              </a:rPr>
-              <a:t>title text format</a:t>
-            </a:r>
-            <a:endParaRPr b="0" lang="en-US" sz="1800" spc="-1" strike="noStrike">
-              <a:solidFill>
-                <a:srgbClr val="000000"/>
-              </a:solidFill>
-              <a:latin typeface="Calibri"/>
+            <a:pPr algn="ctr">
+              <a:buNone/>
+            </a:pPr>
+            <a:r>
+              <a:rPr b="0" lang="en-US" sz="4400" spc="-1" strike="noStrike">
+                <a:latin typeface="Arial"/>
+              </a:rPr>
+              <a:t>Click to edit the title text format</a:t>
+            </a:r>
+            <a:endParaRPr b="0" lang="en-US" sz="4400" spc="-1" strike="noStrike">
+              <a:latin typeface="Arial"/>
             </a:endParaRPr>
           </a:p>
         </p:txBody>
@@ -2698,18 +2527,12 @@
             </a:pPr>
             <a:r>
               <a:rPr b="0" lang="en-US" sz="3200" spc="-1" strike="noStrike">
-                <a:solidFill>
-                  <a:srgbClr val="000000"/>
-                </a:solidFill>
-                <a:latin typeface="Calibri"/>
+                <a:latin typeface="Arial"/>
               </a:rPr>
               <a:t>Click to edit the outline text format</a:t>
             </a:r>
             <a:endParaRPr b="0" lang="en-US" sz="3200" spc="-1" strike="noStrike">
-              <a:solidFill>
-                <a:srgbClr val="000000"/>
-              </a:solidFill>
-              <a:latin typeface="Calibri"/>
+              <a:latin typeface="Arial"/>
             </a:endParaRPr>
           </a:p>
           <a:p>
@@ -2725,19 +2548,13 @@
               <a:buChar char=""/>
             </a:pPr>
             <a:r>
-              <a:rPr b="0" lang="en-US" sz="2400" spc="-1" strike="noStrike">
-                <a:solidFill>
-                  <a:srgbClr val="000000"/>
-                </a:solidFill>
-                <a:latin typeface="Calibri"/>
+              <a:rPr b="0" lang="en-US" sz="2800" spc="-1" strike="noStrike">
+                <a:latin typeface="Arial"/>
               </a:rPr>
               <a:t>Second Outline Level</a:t>
             </a:r>
-            <a:endParaRPr b="0" lang="en-US" sz="2400" spc="-1" strike="noStrike">
-              <a:solidFill>
-                <a:srgbClr val="000000"/>
-              </a:solidFill>
-              <a:latin typeface="Calibri"/>
+            <a:endParaRPr b="0" lang="en-US" sz="2800" spc="-1" strike="noStrike">
+              <a:latin typeface="Arial"/>
             </a:endParaRPr>
           </a:p>
           <a:p>
@@ -2753,19 +2570,13 @@
               <a:buChar char=""/>
             </a:pPr>
             <a:r>
-              <a:rPr b="0" lang="en-US" sz="2000" spc="-1" strike="noStrike">
-                <a:solidFill>
-                  <a:srgbClr val="000000"/>
-                </a:solidFill>
-                <a:latin typeface="Calibri"/>
+              <a:rPr b="0" lang="en-US" sz="2400" spc="-1" strike="noStrike">
+                <a:latin typeface="Arial"/>
               </a:rPr>
               <a:t>Third Outline Level</a:t>
             </a:r>
-            <a:endParaRPr b="0" lang="en-US" sz="2000" spc="-1" strike="noStrike">
-              <a:solidFill>
-                <a:srgbClr val="000000"/>
-              </a:solidFill>
-              <a:latin typeface="Calibri"/>
+            <a:endParaRPr b="0" lang="en-US" sz="2400" spc="-1" strike="noStrike">
+              <a:latin typeface="Arial"/>
             </a:endParaRPr>
           </a:p>
           <a:p>
@@ -2782,18 +2593,12 @@
             </a:pPr>
             <a:r>
               <a:rPr b="0" lang="en-US" sz="2000" spc="-1" strike="noStrike">
-                <a:solidFill>
-                  <a:srgbClr val="000000"/>
-                </a:solidFill>
-                <a:latin typeface="Calibri"/>
+                <a:latin typeface="Arial"/>
               </a:rPr>
               <a:t>Fourth Outline Level</a:t>
             </a:r>
             <a:endParaRPr b="0" lang="en-US" sz="2000" spc="-1" strike="noStrike">
-              <a:solidFill>
-                <a:srgbClr val="000000"/>
-              </a:solidFill>
-              <a:latin typeface="Calibri"/>
+              <a:latin typeface="Arial"/>
             </a:endParaRPr>
           </a:p>
           <a:p>
@@ -2810,18 +2615,12 @@
             </a:pPr>
             <a:r>
               <a:rPr b="0" lang="en-US" sz="2000" spc="-1" strike="noStrike">
-                <a:solidFill>
-                  <a:srgbClr val="000000"/>
-                </a:solidFill>
-                <a:latin typeface="Calibri"/>
+                <a:latin typeface="Arial"/>
               </a:rPr>
               <a:t>Fifth Outline Level</a:t>
             </a:r>
             <a:endParaRPr b="0" lang="en-US" sz="2000" spc="-1" strike="noStrike">
-              <a:solidFill>
-                <a:srgbClr val="000000"/>
-              </a:solidFill>
-              <a:latin typeface="Calibri"/>
+              <a:latin typeface="Arial"/>
             </a:endParaRPr>
           </a:p>
           <a:p>
@@ -2838,18 +2637,12 @@
             </a:pPr>
             <a:r>
               <a:rPr b="0" lang="en-US" sz="2000" spc="-1" strike="noStrike">
-                <a:solidFill>
-                  <a:srgbClr val="000000"/>
-                </a:solidFill>
-                <a:latin typeface="Calibri"/>
+                <a:latin typeface="Arial"/>
               </a:rPr>
               <a:t>Sixth Outline Level</a:t>
             </a:r>
             <a:endParaRPr b="0" lang="en-US" sz="2000" spc="-1" strike="noStrike">
-              <a:solidFill>
-                <a:srgbClr val="000000"/>
-              </a:solidFill>
-              <a:latin typeface="Calibri"/>
+              <a:latin typeface="Arial"/>
             </a:endParaRPr>
           </a:p>
           <a:p>
@@ -2866,18 +2659,12 @@
             </a:pPr>
             <a:r>
               <a:rPr b="0" lang="en-US" sz="2000" spc="-1" strike="noStrike">
-                <a:solidFill>
-                  <a:srgbClr val="000000"/>
-                </a:solidFill>
-                <a:latin typeface="Calibri"/>
+                <a:latin typeface="Arial"/>
               </a:rPr>
               <a:t>Seventh Outline Level</a:t>
             </a:r>
             <a:endParaRPr b="0" lang="en-US" sz="2000" spc="-1" strike="noStrike">
-              <a:solidFill>
-                <a:srgbClr val="000000"/>
-              </a:solidFill>
-              <a:latin typeface="Calibri"/>
+              <a:latin typeface="Arial"/>
             </a:endParaRPr>
           </a:p>
         </p:txBody>
@@ -2935,7 +2722,7 @@
         <p:spPr>
           <a:xfrm>
             <a:off x="0" y="0"/>
-            <a:ext cx="5486040" cy="5143320"/>
+            <a:ext cx="5485680" cy="5142960"/>
           </a:xfrm>
           <a:prstGeom prst="rect">
             <a:avLst/>
@@ -2966,7 +2753,7 @@
         <p:spPr>
           <a:xfrm>
             <a:off x="0" y="0"/>
-            <a:ext cx="109440" cy="5143320"/>
+            <a:ext cx="109080" cy="5142960"/>
           </a:xfrm>
           <a:prstGeom prst="rect">
             <a:avLst/>
@@ -2997,7 +2784,7 @@
         <p:spPr>
           <a:xfrm>
             <a:off x="365760" y="365760"/>
-            <a:ext cx="1096920" cy="914040"/>
+            <a:ext cx="1096560" cy="913680"/>
           </a:xfrm>
           <a:prstGeom prst="rect">
             <a:avLst/>
@@ -3033,6 +2820,7 @@
                   <a:srgbClr val="000000"/>
                 </a:solidFill>
                 <a:latin typeface="Calibri"/>
+                <a:ea typeface="DejaVu Sans"/>
               </a:rPr>
               <a:t>🐾</a:t>
             </a:r>
@@ -3051,7 +2839,7 @@
         <p:spPr>
           <a:xfrm>
             <a:off x="365760" y="1234440"/>
-            <a:ext cx="4937400" cy="776880"/>
+            <a:ext cx="4937040" cy="776520"/>
           </a:xfrm>
           <a:prstGeom prst="rect">
             <a:avLst/>
@@ -3106,7 +2894,7 @@
         <p:spPr>
           <a:xfrm>
             <a:off x="365760" y="2030040"/>
-            <a:ext cx="4937400" cy="502560"/>
+            <a:ext cx="4937040" cy="502200"/>
           </a:xfrm>
           <a:prstGeom prst="rect">
             <a:avLst/>
@@ -3189,7 +2977,7 @@
         <p:spPr>
           <a:xfrm>
             <a:off x="365760" y="2788920"/>
-            <a:ext cx="4937400" cy="365400"/>
+            <a:ext cx="4937040" cy="365040"/>
           </a:xfrm>
           <a:prstGeom prst="rect">
             <a:avLst/>
@@ -3254,7 +3042,7 @@
         <p:spPr>
           <a:xfrm>
             <a:off x="365760" y="3246120"/>
-            <a:ext cx="4937400" cy="365400"/>
+            <a:ext cx="4937040" cy="365040"/>
           </a:xfrm>
           <a:prstGeom prst="rect">
             <a:avLst/>
@@ -3319,7 +3107,7 @@
         <p:spPr>
           <a:xfrm>
             <a:off x="365760" y="3703320"/>
-            <a:ext cx="4937400" cy="365400"/>
+            <a:ext cx="4937040" cy="365040"/>
           </a:xfrm>
           <a:prstGeom prst="rect">
             <a:avLst/>
@@ -3384,7 +3172,7 @@
         <p:spPr>
           <a:xfrm>
             <a:off x="5852160" y="1280160"/>
-            <a:ext cx="1508400" cy="1142640"/>
+            <a:ext cx="1508040" cy="1142280"/>
           </a:xfrm>
           <a:prstGeom prst="rect">
             <a:avLst/>
@@ -3422,7 +3210,7 @@
         <p:spPr>
           <a:xfrm>
             <a:off x="5852160" y="1408320"/>
-            <a:ext cx="1508400" cy="548280"/>
+            <a:ext cx="1508040" cy="547920"/>
           </a:xfrm>
           <a:prstGeom prst="rect">
             <a:avLst/>
@@ -3477,7 +3265,7 @@
         <p:spPr>
           <a:xfrm>
             <a:off x="5852160" y="1938600"/>
-            <a:ext cx="1508400" cy="319680"/>
+            <a:ext cx="1508040" cy="319320"/>
           </a:xfrm>
           <a:prstGeom prst="rect">
             <a:avLst/>
@@ -3532,7 +3320,7 @@
         <p:spPr>
           <a:xfrm>
             <a:off x="7543800" y="1280160"/>
-            <a:ext cx="1508400" cy="1142640"/>
+            <a:ext cx="1508040" cy="1142280"/>
           </a:xfrm>
           <a:prstGeom prst="rect">
             <a:avLst/>
@@ -3570,7 +3358,7 @@
         <p:spPr>
           <a:xfrm>
             <a:off x="7543800" y="1408320"/>
-            <a:ext cx="1508400" cy="548280"/>
+            <a:ext cx="1508040" cy="547920"/>
           </a:xfrm>
           <a:prstGeom prst="rect">
             <a:avLst/>
@@ -3625,7 +3413,7 @@
         <p:spPr>
           <a:xfrm>
             <a:off x="7543800" y="1938600"/>
-            <a:ext cx="1508400" cy="319680"/>
+            <a:ext cx="1508040" cy="319320"/>
           </a:xfrm>
           <a:prstGeom prst="rect">
             <a:avLst/>
@@ -3680,7 +3468,7 @@
         <p:spPr>
           <a:xfrm>
             <a:off x="5852160" y="2697480"/>
-            <a:ext cx="1508400" cy="1142640"/>
+            <a:ext cx="1508040" cy="1142280"/>
           </a:xfrm>
           <a:prstGeom prst="rect">
             <a:avLst/>
@@ -3718,7 +3506,7 @@
         <p:spPr>
           <a:xfrm>
             <a:off x="5852160" y="2825640"/>
-            <a:ext cx="1508400" cy="548280"/>
+            <a:ext cx="1508040" cy="547920"/>
           </a:xfrm>
           <a:prstGeom prst="rect">
             <a:avLst/>
@@ -3773,7 +3561,7 @@
         <p:spPr>
           <a:xfrm>
             <a:off x="5852160" y="3355920"/>
-            <a:ext cx="1508400" cy="319680"/>
+            <a:ext cx="1508040" cy="319320"/>
           </a:xfrm>
           <a:prstGeom prst="rect">
             <a:avLst/>
@@ -3828,7 +3616,7 @@
         <p:spPr>
           <a:xfrm>
             <a:off x="7543800" y="2697480"/>
-            <a:ext cx="1508400" cy="1142640"/>
+            <a:ext cx="1508040" cy="1142280"/>
           </a:xfrm>
           <a:prstGeom prst="rect">
             <a:avLst/>
@@ -3866,7 +3654,7 @@
         <p:spPr>
           <a:xfrm>
             <a:off x="7543800" y="2825640"/>
-            <a:ext cx="1508400" cy="548280"/>
+            <a:ext cx="1508040" cy="547920"/>
           </a:xfrm>
           <a:prstGeom prst="rect">
             <a:avLst/>
@@ -3921,7 +3709,7 @@
         <p:spPr>
           <a:xfrm>
             <a:off x="7543800" y="3355920"/>
-            <a:ext cx="1508400" cy="319680"/>
+            <a:ext cx="1508040" cy="319320"/>
           </a:xfrm>
           <a:prstGeom prst="rect">
             <a:avLst/>
@@ -3976,7 +3764,7 @@
         <p:spPr>
           <a:xfrm>
             <a:off x="5669280" y="4480560"/>
-            <a:ext cx="3291480" cy="319680"/>
+            <a:ext cx="3291120" cy="319320"/>
           </a:xfrm>
           <a:prstGeom prst="rect">
             <a:avLst/>
@@ -4068,7 +3856,7 @@
         <p:spPr>
           <a:xfrm>
             <a:off x="0" y="0"/>
-            <a:ext cx="9143640" cy="822600"/>
+            <a:ext cx="9143280" cy="822240"/>
           </a:xfrm>
           <a:prstGeom prst="rect">
             <a:avLst/>
@@ -4099,7 +3887,7 @@
         <p:spPr>
           <a:xfrm>
             <a:off x="0" y="0"/>
-            <a:ext cx="9143640" cy="63720"/>
+            <a:ext cx="9143280" cy="63360"/>
           </a:xfrm>
           <a:prstGeom prst="rect">
             <a:avLst/>
@@ -4130,7 +3918,7 @@
         <p:spPr>
           <a:xfrm>
             <a:off x="365760" y="128160"/>
-            <a:ext cx="8229240" cy="566640"/>
+            <a:ext cx="8228880" cy="566280"/>
           </a:xfrm>
           <a:prstGeom prst="rect">
             <a:avLst/>
@@ -4185,7 +3973,7 @@
         <p:spPr>
           <a:xfrm>
             <a:off x="365760" y="1005840"/>
-            <a:ext cx="4114440" cy="347040"/>
+            <a:ext cx="4114080" cy="346680"/>
           </a:xfrm>
           <a:prstGeom prst="rect">
             <a:avLst/>
@@ -4240,7 +4028,7 @@
         <p:spPr>
           <a:xfrm>
             <a:off x="320040" y="1463040"/>
-            <a:ext cx="54360" cy="594000"/>
+            <a:ext cx="54000" cy="593640"/>
           </a:xfrm>
           <a:prstGeom prst="rect">
             <a:avLst/>
@@ -4271,7 +4059,7 @@
         <p:spPr>
           <a:xfrm>
             <a:off x="502920" y="1444680"/>
-            <a:ext cx="3840120" cy="273960"/>
+            <a:ext cx="3839760" cy="273600"/>
           </a:xfrm>
           <a:prstGeom prst="rect">
             <a:avLst/>
@@ -4326,7 +4114,7 @@
         <p:spPr>
           <a:xfrm>
             <a:off x="502920" y="1710000"/>
-            <a:ext cx="3840120" cy="365400"/>
+            <a:ext cx="3839760" cy="365040"/>
           </a:xfrm>
           <a:prstGeom prst="rect">
             <a:avLst/>
@@ -4381,7 +4169,7 @@
         <p:spPr>
           <a:xfrm>
             <a:off x="320040" y="2331720"/>
-            <a:ext cx="54360" cy="594000"/>
+            <a:ext cx="54000" cy="593640"/>
           </a:xfrm>
           <a:prstGeom prst="rect">
             <a:avLst/>
@@ -4412,7 +4200,7 @@
         <p:spPr>
           <a:xfrm>
             <a:off x="502920" y="2313360"/>
-            <a:ext cx="3840120" cy="273960"/>
+            <a:ext cx="3839760" cy="273600"/>
           </a:xfrm>
           <a:prstGeom prst="rect">
             <a:avLst/>
@@ -4467,7 +4255,7 @@
         <p:spPr>
           <a:xfrm>
             <a:off x="502920" y="2578680"/>
-            <a:ext cx="3840120" cy="365400"/>
+            <a:ext cx="3839760" cy="365040"/>
           </a:xfrm>
           <a:prstGeom prst="rect">
             <a:avLst/>
@@ -4522,7 +4310,7 @@
         <p:spPr>
           <a:xfrm>
             <a:off x="320040" y="3200400"/>
-            <a:ext cx="54360" cy="594000"/>
+            <a:ext cx="54000" cy="593640"/>
           </a:xfrm>
           <a:prstGeom prst="rect">
             <a:avLst/>
@@ -4553,7 +4341,7 @@
         <p:spPr>
           <a:xfrm>
             <a:off x="502920" y="3182040"/>
-            <a:ext cx="3840120" cy="273960"/>
+            <a:ext cx="3839760" cy="273600"/>
           </a:xfrm>
           <a:prstGeom prst="rect">
             <a:avLst/>
@@ -4608,7 +4396,7 @@
         <p:spPr>
           <a:xfrm>
             <a:off x="502920" y="3447360"/>
-            <a:ext cx="3840120" cy="365400"/>
+            <a:ext cx="3839760" cy="365040"/>
           </a:xfrm>
           <a:prstGeom prst="rect">
             <a:avLst/>
@@ -4663,7 +4451,7 @@
         <p:spPr>
           <a:xfrm>
             <a:off x="320040" y="4069080"/>
-            <a:ext cx="54360" cy="594000"/>
+            <a:ext cx="54000" cy="593640"/>
           </a:xfrm>
           <a:prstGeom prst="rect">
             <a:avLst/>
@@ -4694,7 +4482,7 @@
         <p:spPr>
           <a:xfrm>
             <a:off x="502920" y="4050720"/>
-            <a:ext cx="3840120" cy="273960"/>
+            <a:ext cx="3839760" cy="273600"/>
           </a:xfrm>
           <a:prstGeom prst="rect">
             <a:avLst/>
@@ -4749,7 +4537,7 @@
         <p:spPr>
           <a:xfrm>
             <a:off x="502920" y="4316040"/>
-            <a:ext cx="3840120" cy="365400"/>
+            <a:ext cx="3839760" cy="365040"/>
           </a:xfrm>
           <a:prstGeom prst="rect">
             <a:avLst/>
@@ -4804,7 +4592,7 @@
         <p:spPr>
           <a:xfrm>
             <a:off x="4846320" y="1005840"/>
-            <a:ext cx="4023000" cy="347040"/>
+            <a:ext cx="4022640" cy="346680"/>
           </a:xfrm>
           <a:prstGeom prst="rect">
             <a:avLst/>
@@ -4859,7 +4647,7 @@
         <p:spPr>
           <a:xfrm>
             <a:off x="4846320" y="1463040"/>
-            <a:ext cx="383760" cy="383760"/>
+            <a:ext cx="383400" cy="383400"/>
           </a:xfrm>
           <a:prstGeom prst="rect">
             <a:avLst/>
@@ -4890,7 +4678,7 @@
         <p:spPr>
           <a:xfrm>
             <a:off x="4846320" y="1463040"/>
-            <a:ext cx="383760" cy="383760"/>
+            <a:ext cx="383400" cy="383400"/>
           </a:xfrm>
           <a:prstGeom prst="rect">
             <a:avLst/>
@@ -4945,7 +4733,7 @@
         <p:spPr>
           <a:xfrm>
             <a:off x="5321880" y="1463040"/>
-            <a:ext cx="3565800" cy="219240"/>
+            <a:ext cx="3565440" cy="218880"/>
           </a:xfrm>
           <a:prstGeom prst="rect">
             <a:avLst/>
@@ -5000,7 +4788,7 @@
         <p:spPr>
           <a:xfrm>
             <a:off x="5321880" y="1682640"/>
-            <a:ext cx="3565800" cy="182520"/>
+            <a:ext cx="3565440" cy="182160"/>
           </a:xfrm>
           <a:prstGeom prst="rect">
             <a:avLst/>
@@ -5055,7 +4843,7 @@
         <p:spPr>
           <a:xfrm>
             <a:off x="4846320" y="2176200"/>
-            <a:ext cx="383760" cy="383760"/>
+            <a:ext cx="383400" cy="383400"/>
           </a:xfrm>
           <a:prstGeom prst="rect">
             <a:avLst/>
@@ -5086,7 +4874,7 @@
         <p:spPr>
           <a:xfrm>
             <a:off x="4846320" y="2176200"/>
-            <a:ext cx="383760" cy="383760"/>
+            <a:ext cx="383400" cy="383400"/>
           </a:xfrm>
           <a:prstGeom prst="rect">
             <a:avLst/>
@@ -5141,7 +4929,7 @@
         <p:spPr>
           <a:xfrm>
             <a:off x="5321880" y="2176200"/>
-            <a:ext cx="3565800" cy="219240"/>
+            <a:ext cx="3565440" cy="218880"/>
           </a:xfrm>
           <a:prstGeom prst="rect">
             <a:avLst/>
@@ -5196,7 +4984,7 @@
         <p:spPr>
           <a:xfrm>
             <a:off x="5321880" y="2395800"/>
-            <a:ext cx="3565800" cy="182520"/>
+            <a:ext cx="3565440" cy="182160"/>
           </a:xfrm>
           <a:prstGeom prst="rect">
             <a:avLst/>
@@ -5251,7 +5039,7 @@
         <p:spPr>
           <a:xfrm>
             <a:off x="4846320" y="2889360"/>
-            <a:ext cx="383760" cy="383760"/>
+            <a:ext cx="383400" cy="383400"/>
           </a:xfrm>
           <a:prstGeom prst="rect">
             <a:avLst/>
@@ -5282,7 +5070,7 @@
         <p:spPr>
           <a:xfrm>
             <a:off x="4846320" y="2889360"/>
-            <a:ext cx="383760" cy="383760"/>
+            <a:ext cx="383400" cy="383400"/>
           </a:xfrm>
           <a:prstGeom prst="rect">
             <a:avLst/>
@@ -5337,7 +5125,7 @@
         <p:spPr>
           <a:xfrm>
             <a:off x="5321880" y="2889360"/>
-            <a:ext cx="3565800" cy="219240"/>
+            <a:ext cx="3565440" cy="218880"/>
           </a:xfrm>
           <a:prstGeom prst="rect">
             <a:avLst/>
@@ -5392,7 +5180,7 @@
         <p:spPr>
           <a:xfrm>
             <a:off x="5321880" y="3108960"/>
-            <a:ext cx="3565800" cy="182520"/>
+            <a:ext cx="3565440" cy="182160"/>
           </a:xfrm>
           <a:prstGeom prst="rect">
             <a:avLst/>
@@ -5447,7 +5235,7 @@
         <p:spPr>
           <a:xfrm>
             <a:off x="4846320" y="3602880"/>
-            <a:ext cx="383760" cy="383760"/>
+            <a:ext cx="383400" cy="383400"/>
           </a:xfrm>
           <a:prstGeom prst="rect">
             <a:avLst/>
@@ -5478,7 +5266,7 @@
         <p:spPr>
           <a:xfrm>
             <a:off x="4846320" y="3602880"/>
-            <a:ext cx="383760" cy="383760"/>
+            <a:ext cx="383400" cy="383400"/>
           </a:xfrm>
           <a:prstGeom prst="rect">
             <a:avLst/>
@@ -5533,7 +5321,7 @@
         <p:spPr>
           <a:xfrm>
             <a:off x="5321880" y="3602880"/>
-            <a:ext cx="3565800" cy="219240"/>
+            <a:ext cx="3565440" cy="218880"/>
           </a:xfrm>
           <a:prstGeom prst="rect">
             <a:avLst/>
@@ -5588,7 +5376,7 @@
         <p:spPr>
           <a:xfrm>
             <a:off x="5321880" y="3822120"/>
-            <a:ext cx="3565800" cy="182520"/>
+            <a:ext cx="3565440" cy="182160"/>
           </a:xfrm>
           <a:prstGeom prst="rect">
             <a:avLst/>
@@ -5643,7 +5431,7 @@
         <p:spPr>
           <a:xfrm>
             <a:off x="4846320" y="4316040"/>
-            <a:ext cx="383760" cy="383760"/>
+            <a:ext cx="383400" cy="383400"/>
           </a:xfrm>
           <a:prstGeom prst="rect">
             <a:avLst/>
@@ -5674,7 +5462,7 @@
         <p:spPr>
           <a:xfrm>
             <a:off x="4846320" y="4316040"/>
-            <a:ext cx="383760" cy="383760"/>
+            <a:ext cx="383400" cy="383400"/>
           </a:xfrm>
           <a:prstGeom prst="rect">
             <a:avLst/>
@@ -5729,7 +5517,7 @@
         <p:spPr>
           <a:xfrm>
             <a:off x="5321880" y="4316040"/>
-            <a:ext cx="3565800" cy="219240"/>
+            <a:ext cx="3565440" cy="218880"/>
           </a:xfrm>
           <a:prstGeom prst="rect">
             <a:avLst/>
@@ -5784,7 +5572,7 @@
         <p:spPr>
           <a:xfrm>
             <a:off x="5321880" y="4535280"/>
-            <a:ext cx="3565800" cy="182520"/>
+            <a:ext cx="3565440" cy="182160"/>
           </a:xfrm>
           <a:prstGeom prst="rect">
             <a:avLst/>
@@ -5876,7 +5664,7 @@
         <p:spPr>
           <a:xfrm>
             <a:off x="0" y="0"/>
-            <a:ext cx="9143640" cy="822600"/>
+            <a:ext cx="9143280" cy="822240"/>
           </a:xfrm>
           <a:prstGeom prst="rect">
             <a:avLst/>
@@ -5907,7 +5695,7 @@
         <p:spPr>
           <a:xfrm>
             <a:off x="0" y="0"/>
-            <a:ext cx="9143640" cy="63720"/>
+            <a:ext cx="9143280" cy="63360"/>
           </a:xfrm>
           <a:prstGeom prst="rect">
             <a:avLst/>
@@ -5938,7 +5726,7 @@
         <p:spPr>
           <a:xfrm>
             <a:off x="365760" y="128160"/>
-            <a:ext cx="8229240" cy="566640"/>
+            <a:ext cx="8228880" cy="566280"/>
           </a:xfrm>
           <a:prstGeom prst="rect">
             <a:avLst/>
@@ -5993,7 +5781,7 @@
         <p:spPr>
           <a:xfrm>
             <a:off x="274320" y="960120"/>
-            <a:ext cx="1965600" cy="1325520"/>
+            <a:ext cx="1965240" cy="1325160"/>
           </a:xfrm>
           <a:prstGeom prst="rect">
             <a:avLst/>
@@ -6031,7 +5819,7 @@
         <p:spPr>
           <a:xfrm>
             <a:off x="274320" y="1024200"/>
-            <a:ext cx="1965600" cy="594000"/>
+            <a:ext cx="1965240" cy="593640"/>
           </a:xfrm>
           <a:prstGeom prst="rect">
             <a:avLst/>
@@ -6086,7 +5874,7 @@
         <p:spPr>
           <a:xfrm>
             <a:off x="274320" y="1600200"/>
-            <a:ext cx="1965600" cy="255600"/>
+            <a:ext cx="1965240" cy="255240"/>
           </a:xfrm>
           <a:prstGeom prst="rect">
             <a:avLst/>
@@ -6141,7 +5929,7 @@
         <p:spPr>
           <a:xfrm>
             <a:off x="274320" y="1847160"/>
-            <a:ext cx="1965600" cy="273960"/>
+            <a:ext cx="1965240" cy="273600"/>
           </a:xfrm>
           <a:prstGeom prst="rect">
             <a:avLst/>
@@ -6196,7 +5984,7 @@
         <p:spPr>
           <a:xfrm>
             <a:off x="2450520" y="960120"/>
-            <a:ext cx="1965600" cy="1325520"/>
+            <a:ext cx="1965240" cy="1325160"/>
           </a:xfrm>
           <a:prstGeom prst="rect">
             <a:avLst/>
@@ -6234,7 +6022,7 @@
         <p:spPr>
           <a:xfrm>
             <a:off x="2450520" y="1024200"/>
-            <a:ext cx="1965600" cy="594000"/>
+            <a:ext cx="1965240" cy="593640"/>
           </a:xfrm>
           <a:prstGeom prst="rect">
             <a:avLst/>
@@ -6289,7 +6077,7 @@
         <p:spPr>
           <a:xfrm>
             <a:off x="2450520" y="1600200"/>
-            <a:ext cx="1965600" cy="255600"/>
+            <a:ext cx="1965240" cy="255240"/>
           </a:xfrm>
           <a:prstGeom prst="rect">
             <a:avLst/>
@@ -6344,7 +6132,7 @@
         <p:spPr>
           <a:xfrm>
             <a:off x="2450520" y="1847160"/>
-            <a:ext cx="1965600" cy="273960"/>
+            <a:ext cx="1965240" cy="273600"/>
           </a:xfrm>
           <a:prstGeom prst="rect">
             <a:avLst/>
@@ -6399,7 +6187,7 @@
         <p:spPr>
           <a:xfrm>
             <a:off x="4626720" y="960120"/>
-            <a:ext cx="1965600" cy="1325520"/>
+            <a:ext cx="1965240" cy="1325160"/>
           </a:xfrm>
           <a:prstGeom prst="rect">
             <a:avLst/>
@@ -6437,7 +6225,7 @@
         <p:spPr>
           <a:xfrm>
             <a:off x="4626720" y="1024200"/>
-            <a:ext cx="1965600" cy="594000"/>
+            <a:ext cx="1965240" cy="593640"/>
           </a:xfrm>
           <a:prstGeom prst="rect">
             <a:avLst/>
@@ -6492,7 +6280,7 @@
         <p:spPr>
           <a:xfrm>
             <a:off x="4626720" y="1600200"/>
-            <a:ext cx="1965600" cy="255600"/>
+            <a:ext cx="1965240" cy="255240"/>
           </a:xfrm>
           <a:prstGeom prst="rect">
             <a:avLst/>
@@ -6547,7 +6335,7 @@
         <p:spPr>
           <a:xfrm>
             <a:off x="4626720" y="1847160"/>
-            <a:ext cx="1965600" cy="273960"/>
+            <a:ext cx="1965240" cy="273600"/>
           </a:xfrm>
           <a:prstGeom prst="rect">
             <a:avLst/>
@@ -6602,7 +6390,7 @@
         <p:spPr>
           <a:xfrm>
             <a:off x="6803280" y="960120"/>
-            <a:ext cx="1965600" cy="1325520"/>
+            <a:ext cx="1965240" cy="1325160"/>
           </a:xfrm>
           <a:prstGeom prst="rect">
             <a:avLst/>
@@ -6640,7 +6428,7 @@
         <p:spPr>
           <a:xfrm>
             <a:off x="6803280" y="1024200"/>
-            <a:ext cx="1965600" cy="594000"/>
+            <a:ext cx="1965240" cy="593640"/>
           </a:xfrm>
           <a:prstGeom prst="rect">
             <a:avLst/>
@@ -6695,7 +6483,7 @@
         <p:spPr>
           <a:xfrm>
             <a:off x="6803280" y="1600200"/>
-            <a:ext cx="1965600" cy="255600"/>
+            <a:ext cx="1965240" cy="255240"/>
           </a:xfrm>
           <a:prstGeom prst="rect">
             <a:avLst/>
@@ -6750,7 +6538,7 @@
         <p:spPr>
           <a:xfrm>
             <a:off x="6803280" y="1847160"/>
-            <a:ext cx="1965600" cy="273960"/>
+            <a:ext cx="1965240" cy="273600"/>
           </a:xfrm>
           <a:prstGeom prst="rect">
             <a:avLst/>
@@ -6805,7 +6593,7 @@
         <p:spPr>
           <a:xfrm>
             <a:off x="365760" y="2514600"/>
-            <a:ext cx="3840120" cy="292320"/>
+            <a:ext cx="3839760" cy="291960"/>
           </a:xfrm>
           <a:prstGeom prst="rect">
             <a:avLst/>
@@ -6860,7 +6648,7 @@
         <p:spPr>
           <a:xfrm>
             <a:off x="365760" y="2834640"/>
-            <a:ext cx="1645560" cy="237240"/>
+            <a:ext cx="1645200" cy="236880"/>
           </a:xfrm>
           <a:prstGeom prst="rect">
             <a:avLst/>
@@ -6915,7 +6703,7 @@
         <p:spPr>
           <a:xfrm>
             <a:off x="2057400" y="2871360"/>
-            <a:ext cx="1828440" cy="182520"/>
+            <a:ext cx="1828080" cy="182160"/>
           </a:xfrm>
           <a:prstGeom prst="rect">
             <a:avLst/>
@@ -6946,7 +6734,7 @@
         <p:spPr>
           <a:xfrm>
             <a:off x="2057400" y="2871360"/>
-            <a:ext cx="1810080" cy="182520"/>
+            <a:ext cx="1809720" cy="182160"/>
           </a:xfrm>
           <a:prstGeom prst="rect">
             <a:avLst/>
@@ -6977,7 +6765,7 @@
         <p:spPr>
           <a:xfrm>
             <a:off x="3931920" y="2834640"/>
-            <a:ext cx="456840" cy="237240"/>
+            <a:ext cx="456480" cy="236880"/>
           </a:xfrm>
           <a:prstGeom prst="rect">
             <a:avLst/>
@@ -7032,7 +6820,7 @@
         <p:spPr>
           <a:xfrm>
             <a:off x="365760" y="3237120"/>
-            <a:ext cx="1645560" cy="237240"/>
+            <a:ext cx="1645200" cy="236880"/>
           </a:xfrm>
           <a:prstGeom prst="rect">
             <a:avLst/>
@@ -7087,7 +6875,7 @@
         <p:spPr>
           <a:xfrm>
             <a:off x="2057400" y="3273480"/>
-            <a:ext cx="1828440" cy="182520"/>
+            <a:ext cx="1828080" cy="182160"/>
           </a:xfrm>
           <a:prstGeom prst="rect">
             <a:avLst/>
@@ -7118,7 +6906,7 @@
         <p:spPr>
           <a:xfrm>
             <a:off x="2057400" y="3273480"/>
-            <a:ext cx="1791720" cy="182520"/>
+            <a:ext cx="1791360" cy="182160"/>
           </a:xfrm>
           <a:prstGeom prst="rect">
             <a:avLst/>
@@ -7149,7 +6937,7 @@
         <p:spPr>
           <a:xfrm>
             <a:off x="3931920" y="3237120"/>
-            <a:ext cx="456840" cy="237240"/>
+            <a:ext cx="456480" cy="236880"/>
           </a:xfrm>
           <a:prstGeom prst="rect">
             <a:avLst/>
@@ -7204,7 +6992,7 @@
         <p:spPr>
           <a:xfrm>
             <a:off x="365760" y="3639240"/>
-            <a:ext cx="1645560" cy="237240"/>
+            <a:ext cx="1645200" cy="236880"/>
           </a:xfrm>
           <a:prstGeom prst="rect">
             <a:avLst/>
@@ -7259,7 +7047,7 @@
         <p:spPr>
           <a:xfrm>
             <a:off x="2057400" y="3675960"/>
-            <a:ext cx="1828440" cy="182520"/>
+            <a:ext cx="1828080" cy="182160"/>
           </a:xfrm>
           <a:prstGeom prst="rect">
             <a:avLst/>
@@ -7290,7 +7078,7 @@
         <p:spPr>
           <a:xfrm>
             <a:off x="2057400" y="3675960"/>
-            <a:ext cx="1791720" cy="182520"/>
+            <a:ext cx="1791360" cy="182160"/>
           </a:xfrm>
           <a:prstGeom prst="rect">
             <a:avLst/>
@@ -7321,7 +7109,7 @@
         <p:spPr>
           <a:xfrm>
             <a:off x="3931920" y="3639240"/>
-            <a:ext cx="456840" cy="237240"/>
+            <a:ext cx="456480" cy="236880"/>
           </a:xfrm>
           <a:prstGeom prst="rect">
             <a:avLst/>
@@ -7376,7 +7164,7 @@
         <p:spPr>
           <a:xfrm>
             <a:off x="365760" y="4041720"/>
-            <a:ext cx="1645560" cy="237240"/>
+            <a:ext cx="1645200" cy="236880"/>
           </a:xfrm>
           <a:prstGeom prst="rect">
             <a:avLst/>
@@ -7431,7 +7219,7 @@
         <p:spPr>
           <a:xfrm>
             <a:off x="2057400" y="4078080"/>
-            <a:ext cx="1828440" cy="182520"/>
+            <a:ext cx="1828080" cy="182160"/>
           </a:xfrm>
           <a:prstGeom prst="rect">
             <a:avLst/>
@@ -7462,7 +7250,7 @@
         <p:spPr>
           <a:xfrm>
             <a:off x="2057400" y="4078080"/>
-            <a:ext cx="1773720" cy="182520"/>
+            <a:ext cx="1773360" cy="182160"/>
           </a:xfrm>
           <a:prstGeom prst="rect">
             <a:avLst/>
@@ -7493,7 +7281,7 @@
         <p:spPr>
           <a:xfrm>
             <a:off x="3931920" y="4041720"/>
-            <a:ext cx="456840" cy="237240"/>
+            <a:ext cx="456480" cy="236880"/>
           </a:xfrm>
           <a:prstGeom prst="rect">
             <a:avLst/>
@@ -7548,7 +7336,7 @@
         <p:spPr>
           <a:xfrm>
             <a:off x="365760" y="4443840"/>
-            <a:ext cx="1645560" cy="237240"/>
+            <a:ext cx="1645200" cy="236880"/>
           </a:xfrm>
           <a:prstGeom prst="rect">
             <a:avLst/>
@@ -7603,7 +7391,7 @@
         <p:spPr>
           <a:xfrm>
             <a:off x="2057400" y="4480560"/>
-            <a:ext cx="1828440" cy="182520"/>
+            <a:ext cx="1828080" cy="182160"/>
           </a:xfrm>
           <a:prstGeom prst="rect">
             <a:avLst/>
@@ -7634,7 +7422,7 @@
         <p:spPr>
           <a:xfrm>
             <a:off x="2057400" y="4480560"/>
-            <a:ext cx="1773720" cy="182520"/>
+            <a:ext cx="1773360" cy="182160"/>
           </a:xfrm>
           <a:prstGeom prst="rect">
             <a:avLst/>
@@ -7665,7 +7453,7 @@
         <p:spPr>
           <a:xfrm>
             <a:off x="3931920" y="4443840"/>
-            <a:ext cx="456840" cy="237240"/>
+            <a:ext cx="456480" cy="236880"/>
           </a:xfrm>
           <a:prstGeom prst="rect">
             <a:avLst/>
@@ -7720,7 +7508,7 @@
         <p:spPr>
           <a:xfrm>
             <a:off x="4572000" y="2514600"/>
-            <a:ext cx="4297320" cy="292320"/>
+            <a:ext cx="4296960" cy="291960"/>
           </a:xfrm>
           <a:prstGeom prst="rect">
             <a:avLst/>
@@ -7775,7 +7563,7 @@
         <p:spPr>
           <a:xfrm>
             <a:off x="4572000" y="2834640"/>
-            <a:ext cx="1645560" cy="237240"/>
+            <a:ext cx="1645200" cy="236880"/>
           </a:xfrm>
           <a:prstGeom prst="rect">
             <a:avLst/>
@@ -7830,7 +7618,7 @@
         <p:spPr>
           <a:xfrm>
             <a:off x="6263640" y="2871360"/>
-            <a:ext cx="1828440" cy="182520"/>
+            <a:ext cx="1828080" cy="182160"/>
           </a:xfrm>
           <a:prstGeom prst="rect">
             <a:avLst/>
@@ -7861,7 +7649,7 @@
         <p:spPr>
           <a:xfrm>
             <a:off x="6263640" y="2871360"/>
-            <a:ext cx="1014840" cy="182520"/>
+            <a:ext cx="1014480" cy="182160"/>
           </a:xfrm>
           <a:prstGeom prst="rect">
             <a:avLst/>
@@ -7892,7 +7680,7 @@
         <p:spPr>
           <a:xfrm>
             <a:off x="8138160" y="2834640"/>
-            <a:ext cx="456840" cy="237240"/>
+            <a:ext cx="456480" cy="236880"/>
           </a:xfrm>
           <a:prstGeom prst="rect">
             <a:avLst/>
@@ -7947,7 +7735,7 @@
         <p:spPr>
           <a:xfrm>
             <a:off x="4572000" y="3237120"/>
-            <a:ext cx="1645560" cy="237240"/>
+            <a:ext cx="1645200" cy="236880"/>
           </a:xfrm>
           <a:prstGeom prst="rect">
             <a:avLst/>
@@ -8002,7 +7790,7 @@
         <p:spPr>
           <a:xfrm>
             <a:off x="6263640" y="3273480"/>
-            <a:ext cx="1828440" cy="182520"/>
+            <a:ext cx="1828080" cy="182160"/>
           </a:xfrm>
           <a:prstGeom prst="rect">
             <a:avLst/>
@@ -8033,7 +7821,7 @@
         <p:spPr>
           <a:xfrm>
             <a:off x="6263640" y="3273480"/>
-            <a:ext cx="1133640" cy="182520"/>
+            <a:ext cx="1133280" cy="182160"/>
           </a:xfrm>
           <a:prstGeom prst="rect">
             <a:avLst/>
@@ -8064,7 +7852,7 @@
         <p:spPr>
           <a:xfrm>
             <a:off x="8138160" y="3237120"/>
-            <a:ext cx="456840" cy="237240"/>
+            <a:ext cx="456480" cy="236880"/>
           </a:xfrm>
           <a:prstGeom prst="rect">
             <a:avLst/>
@@ -8119,7 +7907,7 @@
         <p:spPr>
           <a:xfrm>
             <a:off x="4572000" y="3639240"/>
-            <a:ext cx="1645560" cy="237240"/>
+            <a:ext cx="1645200" cy="236880"/>
           </a:xfrm>
           <a:prstGeom prst="rect">
             <a:avLst/>
@@ -8174,7 +7962,7 @@
         <p:spPr>
           <a:xfrm>
             <a:off x="6263640" y="3675960"/>
-            <a:ext cx="1828440" cy="182520"/>
+            <a:ext cx="1828080" cy="182160"/>
           </a:xfrm>
           <a:prstGeom prst="rect">
             <a:avLst/>
@@ -8205,7 +7993,7 @@
         <p:spPr>
           <a:xfrm>
             <a:off x="6263640" y="3675960"/>
-            <a:ext cx="1133640" cy="182520"/>
+            <a:ext cx="1133280" cy="182160"/>
           </a:xfrm>
           <a:prstGeom prst="rect">
             <a:avLst/>
@@ -8236,7 +8024,7 @@
         <p:spPr>
           <a:xfrm>
             <a:off x="8138160" y="3639240"/>
-            <a:ext cx="456840" cy="237240"/>
+            <a:ext cx="456480" cy="236880"/>
           </a:xfrm>
           <a:prstGeom prst="rect">
             <a:avLst/>
@@ -8291,7 +8079,7 @@
         <p:spPr>
           <a:xfrm>
             <a:off x="4572000" y="4041720"/>
-            <a:ext cx="1645560" cy="237240"/>
+            <a:ext cx="1645200" cy="236880"/>
           </a:xfrm>
           <a:prstGeom prst="rect">
             <a:avLst/>
@@ -8346,7 +8134,7 @@
         <p:spPr>
           <a:xfrm>
             <a:off x="6263640" y="4078080"/>
-            <a:ext cx="1828440" cy="182520"/>
+            <a:ext cx="1828080" cy="182160"/>
           </a:xfrm>
           <a:prstGeom prst="rect">
             <a:avLst/>
@@ -8377,7 +8165,7 @@
         <p:spPr>
           <a:xfrm>
             <a:off x="6263640" y="4078080"/>
-            <a:ext cx="1481040" cy="182520"/>
+            <a:ext cx="1480680" cy="182160"/>
           </a:xfrm>
           <a:prstGeom prst="rect">
             <a:avLst/>
@@ -8408,7 +8196,7 @@
         <p:spPr>
           <a:xfrm>
             <a:off x="8138160" y="4041720"/>
-            <a:ext cx="456840" cy="237240"/>
+            <a:ext cx="456480" cy="236880"/>
           </a:xfrm>
           <a:prstGeom prst="rect">
             <a:avLst/>
@@ -8463,7 +8251,7 @@
         <p:spPr>
           <a:xfrm>
             <a:off x="4572000" y="4443840"/>
-            <a:ext cx="1645560" cy="237240"/>
+            <a:ext cx="1645200" cy="236880"/>
           </a:xfrm>
           <a:prstGeom prst="rect">
             <a:avLst/>
@@ -8518,7 +8306,7 @@
         <p:spPr>
           <a:xfrm>
             <a:off x="6263640" y="4480560"/>
-            <a:ext cx="1828440" cy="182520"/>
+            <a:ext cx="1828080" cy="182160"/>
           </a:xfrm>
           <a:prstGeom prst="rect">
             <a:avLst/>
@@ -8549,7 +8337,7 @@
         <p:spPr>
           <a:xfrm>
             <a:off x="6263640" y="4480560"/>
-            <a:ext cx="1517400" cy="182520"/>
+            <a:ext cx="1517040" cy="182160"/>
           </a:xfrm>
           <a:prstGeom prst="rect">
             <a:avLst/>
@@ -8580,7 +8368,7 @@
         <p:spPr>
           <a:xfrm>
             <a:off x="8138160" y="4443840"/>
-            <a:ext cx="456840" cy="237240"/>
+            <a:ext cx="456480" cy="236880"/>
           </a:xfrm>
           <a:prstGeom prst="rect">
             <a:avLst/>
@@ -8672,7 +8460,7 @@
         <p:spPr>
           <a:xfrm>
             <a:off x="0" y="0"/>
-            <a:ext cx="9143640" cy="822600"/>
+            <a:ext cx="9143280" cy="822240"/>
           </a:xfrm>
           <a:prstGeom prst="rect">
             <a:avLst/>
@@ -8703,7 +8491,7 @@
         <p:spPr>
           <a:xfrm>
             <a:off x="0" y="0"/>
-            <a:ext cx="9143640" cy="63720"/>
+            <a:ext cx="9143280" cy="63360"/>
           </a:xfrm>
           <a:prstGeom prst="rect">
             <a:avLst/>
@@ -8734,7 +8522,7 @@
         <p:spPr>
           <a:xfrm>
             <a:off x="365760" y="128160"/>
-            <a:ext cx="8229240" cy="566640"/>
+            <a:ext cx="8228880" cy="566280"/>
           </a:xfrm>
           <a:prstGeom prst="rect">
             <a:avLst/>
@@ -8789,7 +8577,7 @@
         <p:spPr>
           <a:xfrm>
             <a:off x="235440" y="1005840"/>
-            <a:ext cx="4205880" cy="347040"/>
+            <a:ext cx="4205520" cy="346680"/>
           </a:xfrm>
           <a:prstGeom prst="rect">
             <a:avLst/>
@@ -8844,7 +8632,7 @@
         <p:spPr>
           <a:xfrm>
             <a:off x="235440" y="1409400"/>
-            <a:ext cx="8451360" cy="1005480"/>
+            <a:ext cx="8451000" cy="1005120"/>
           </a:xfrm>
           <a:prstGeom prst="rect">
             <a:avLst/>
@@ -8882,7 +8670,7 @@
         <p:spPr>
           <a:xfrm>
             <a:off x="345240" y="1473480"/>
-            <a:ext cx="3931560" cy="273960"/>
+            <a:ext cx="3931200" cy="273600"/>
           </a:xfrm>
           <a:prstGeom prst="rect">
             <a:avLst/>
@@ -8947,7 +8735,7 @@
         <p:spPr>
           <a:xfrm>
             <a:off x="345240" y="1775160"/>
-            <a:ext cx="8341560" cy="548280"/>
+            <a:ext cx="8341200" cy="547920"/>
           </a:xfrm>
           <a:prstGeom prst="rect">
             <a:avLst/>
@@ -9002,7 +8790,7 @@
         <p:spPr>
           <a:xfrm>
             <a:off x="235440" y="2552400"/>
-            <a:ext cx="8451360" cy="1005480"/>
+            <a:ext cx="8451000" cy="1005120"/>
           </a:xfrm>
           <a:prstGeom prst="rect">
             <a:avLst/>
@@ -9040,7 +8828,7 @@
         <p:spPr>
           <a:xfrm>
             <a:off x="345240" y="2616480"/>
-            <a:ext cx="3931560" cy="273960"/>
+            <a:ext cx="3931200" cy="273600"/>
           </a:xfrm>
           <a:prstGeom prst="rect">
             <a:avLst/>
@@ -9104,8 +8892,8 @@
         </p:nvSpPr>
         <p:spPr>
           <a:xfrm rot="21597600">
-            <a:off x="345240" y="2914920"/>
-            <a:ext cx="8341560" cy="548280"/>
+            <a:off x="344880" y="2914560"/>
+            <a:ext cx="8341200" cy="547920"/>
           </a:xfrm>
           <a:prstGeom prst="rect">
             <a:avLst/>
@@ -9160,7 +8948,7 @@
         <p:spPr>
           <a:xfrm>
             <a:off x="235440" y="3695400"/>
-            <a:ext cx="8451360" cy="1005480"/>
+            <a:ext cx="8451000" cy="1005120"/>
           </a:xfrm>
           <a:prstGeom prst="rect">
             <a:avLst/>
@@ -9198,7 +8986,7 @@
         <p:spPr>
           <a:xfrm>
             <a:off x="345240" y="3759480"/>
-            <a:ext cx="3931560" cy="273960"/>
+            <a:ext cx="3931200" cy="273600"/>
           </a:xfrm>
           <a:prstGeom prst="rect">
             <a:avLst/>
@@ -9263,7 +9051,7 @@
         <p:spPr>
           <a:xfrm>
             <a:off x="345240" y="4061160"/>
-            <a:ext cx="8341560" cy="548280"/>
+            <a:ext cx="8341200" cy="547920"/>
           </a:xfrm>
           <a:prstGeom prst="rect">
             <a:avLst/>
@@ -9318,7 +9106,7 @@
         <p:spPr>
           <a:xfrm>
             <a:off x="0" y="4800600"/>
-            <a:ext cx="9143640" cy="342720"/>
+            <a:ext cx="9143280" cy="342360"/>
           </a:xfrm>
           <a:prstGeom prst="rect">
             <a:avLst/>
@@ -9349,7 +9137,7 @@
         <p:spPr>
           <a:xfrm>
             <a:off x="365760" y="4827960"/>
-            <a:ext cx="8229240" cy="273960"/>
+            <a:ext cx="8228880" cy="273600"/>
           </a:xfrm>
           <a:prstGeom prst="rect">
             <a:avLst/>
@@ -9397,7 +9185,7 @@
                 <a:latin typeface="Calibri"/>
                 <a:ea typeface="Calibri"/>
               </a:rPr>
-              <a:t>github.com/luisrenteria/oxford-pets-classifier</a:t>
+              <a:t>github.com/renteria-luis/oxford-pets-classifier</a:t>
             </a:r>
             <a:endParaRPr b="0" lang="en-US" sz="1100" spc="-1" strike="noStrike">
               <a:latin typeface="Arial"/>
